--- a/12-group-presentations/slides.pptx
+++ b/12-group-presentations/slides.pptx
@@ -931,7 +931,7 @@
           <a:bodyPr anchor="t"/>
           <a:lstStyle>
             <a:lvl1pPr algn="l">
-              <a:defRPr sz="3000" b="1" cap="all"/>
+              <a:defRPr sz="2350" b="1" cap="all"/>
             </a:lvl1pPr>
           </a:lstStyle>
           <a:p>
@@ -963,7 +963,7 @@
           <a:lstStyle>
             <a:lvl1pPr marL="0" indent="0">
               <a:buNone/>
-              <a:defRPr sz="1500">
+              <a:defRPr sz="1150">
                 <a:solidFill>
                   <a:schemeClr val="tx1">
                     <a:tint val="75000"/>
@@ -973,7 +973,7 @@
             </a:lvl1pPr>
             <a:lvl2pPr marL="342900" indent="0">
               <a:buNone/>
-              <a:defRPr sz="1350">
+              <a:defRPr sz="1050">
                 <a:solidFill>
                   <a:schemeClr val="tx1">
                     <a:tint val="75000"/>
@@ -983,7 +983,7 @@
             </a:lvl2pPr>
             <a:lvl3pPr marL="685800" indent="0">
               <a:buNone/>
-              <a:defRPr sz="1200">
+              <a:defRPr sz="950">
                 <a:solidFill>
                   <a:schemeClr val="tx1">
                     <a:tint val="75000"/>
@@ -993,7 +993,7 @@
             </a:lvl3pPr>
             <a:lvl4pPr marL="1028700" indent="0">
               <a:buNone/>
-              <a:defRPr sz="1050">
+              <a:defRPr sz="800">
                 <a:solidFill>
                   <a:schemeClr val="tx1">
                     <a:tint val="75000"/>
@@ -1003,7 +1003,7 @@
             </a:lvl4pPr>
             <a:lvl5pPr marL="1371600" indent="0">
               <a:buNone/>
-              <a:defRPr sz="1050">
+              <a:defRPr sz="800">
                 <a:solidFill>
                   <a:schemeClr val="tx1">
                     <a:tint val="75000"/>
@@ -1013,7 +1013,7 @@
             </a:lvl5pPr>
             <a:lvl6pPr marL="1714500" indent="0">
               <a:buNone/>
-              <a:defRPr sz="1050">
+              <a:defRPr sz="800">
                 <a:solidFill>
                   <a:schemeClr val="tx1">
                     <a:tint val="75000"/>
@@ -1023,7 +1023,7 @@
             </a:lvl6pPr>
             <a:lvl7pPr marL="2057400" indent="0">
               <a:buNone/>
-              <a:defRPr sz="1050">
+              <a:defRPr sz="800">
                 <a:solidFill>
                   <a:schemeClr val="tx1">
                     <a:tint val="75000"/>
@@ -1033,7 +1033,7 @@
             </a:lvl7pPr>
             <a:lvl8pPr marL="2400300" indent="0">
               <a:buNone/>
-              <a:defRPr sz="1050">
+              <a:defRPr sz="800">
                 <a:solidFill>
                   <a:schemeClr val="tx1">
                     <a:tint val="75000"/>
@@ -1043,7 +1043,7 @@
             </a:lvl8pPr>
             <a:lvl9pPr marL="2743200" indent="0">
               <a:buNone/>
-              <a:defRPr sz="1050">
+              <a:defRPr sz="800">
                 <a:solidFill>
                   <a:schemeClr val="tx1">
                     <a:tint val="75000"/>
@@ -1198,31 +1198,31 @@
           <a:bodyPr/>
           <a:lstStyle>
             <a:lvl1pPr>
-              <a:defRPr sz="2100"/>
+              <a:defRPr sz="1650"/>
             </a:lvl1pPr>
             <a:lvl2pPr>
-              <a:defRPr sz="1800"/>
+              <a:defRPr sz="1400"/>
             </a:lvl2pPr>
             <a:lvl3pPr>
-              <a:defRPr sz="1500"/>
+              <a:defRPr sz="1150"/>
             </a:lvl3pPr>
             <a:lvl4pPr>
-              <a:defRPr sz="1350"/>
+              <a:defRPr sz="1050"/>
             </a:lvl4pPr>
             <a:lvl5pPr>
-              <a:defRPr sz="1350"/>
+              <a:defRPr sz="1050"/>
             </a:lvl5pPr>
             <a:lvl6pPr>
-              <a:defRPr sz="1350"/>
+              <a:defRPr sz="1050"/>
             </a:lvl6pPr>
             <a:lvl7pPr>
-              <a:defRPr sz="1350"/>
+              <a:defRPr sz="1050"/>
             </a:lvl7pPr>
             <a:lvl8pPr>
-              <a:defRPr sz="1350"/>
+              <a:defRPr sz="1050"/>
             </a:lvl8pPr>
             <a:lvl9pPr>
-              <a:defRPr sz="1350"/>
+              <a:defRPr sz="1050"/>
             </a:lvl9pPr>
           </a:lstStyle>
           <a:p>
@@ -1282,31 +1282,31 @@
           <a:bodyPr/>
           <a:lstStyle>
             <a:lvl1pPr>
-              <a:defRPr sz="2100"/>
+              <a:defRPr sz="1650"/>
             </a:lvl1pPr>
             <a:lvl2pPr>
-              <a:defRPr sz="1800"/>
+              <a:defRPr sz="1400"/>
             </a:lvl2pPr>
             <a:lvl3pPr>
-              <a:defRPr sz="1500"/>
+              <a:defRPr sz="1150"/>
             </a:lvl3pPr>
             <a:lvl4pPr>
-              <a:defRPr sz="1350"/>
+              <a:defRPr sz="1050"/>
             </a:lvl4pPr>
             <a:lvl5pPr>
-              <a:defRPr sz="1350"/>
+              <a:defRPr sz="1050"/>
             </a:lvl5pPr>
             <a:lvl6pPr>
-              <a:defRPr sz="1350"/>
+              <a:defRPr sz="1050"/>
             </a:lvl6pPr>
             <a:lvl7pPr>
-              <a:defRPr sz="1350"/>
+              <a:defRPr sz="1050"/>
             </a:lvl7pPr>
             <a:lvl8pPr>
-              <a:defRPr sz="1350"/>
+              <a:defRPr sz="1050"/>
             </a:lvl8pPr>
             <a:lvl9pPr>
-              <a:defRPr sz="1350"/>
+              <a:defRPr sz="1050"/>
             </a:lvl9pPr>
           </a:lstStyle>
           <a:p>
@@ -1488,39 +1488,39 @@
           <a:lstStyle>
             <a:lvl1pPr marL="0" indent="0">
               <a:buNone/>
-              <a:defRPr sz="1800" b="1"/>
+              <a:defRPr sz="1400" b="1"/>
             </a:lvl1pPr>
             <a:lvl2pPr marL="342900" indent="0">
               <a:buNone/>
-              <a:defRPr sz="1500" b="1"/>
+              <a:defRPr sz="1150" b="1"/>
             </a:lvl2pPr>
             <a:lvl3pPr marL="685800" indent="0">
               <a:buNone/>
-              <a:defRPr sz="1350" b="1"/>
+              <a:defRPr sz="1050" b="1"/>
             </a:lvl3pPr>
             <a:lvl4pPr marL="1028700" indent="0">
               <a:buNone/>
-              <a:defRPr sz="1200" b="1"/>
+              <a:defRPr sz="950" b="1"/>
             </a:lvl4pPr>
             <a:lvl5pPr marL="1371600" indent="0">
               <a:buNone/>
-              <a:defRPr sz="1200" b="1"/>
+              <a:defRPr sz="950" b="1"/>
             </a:lvl5pPr>
             <a:lvl6pPr marL="1714500" indent="0">
               <a:buNone/>
-              <a:defRPr sz="1200" b="1"/>
+              <a:defRPr sz="950" b="1"/>
             </a:lvl6pPr>
             <a:lvl7pPr marL="2057400" indent="0">
               <a:buNone/>
-              <a:defRPr sz="1200" b="1"/>
+              <a:defRPr sz="950" b="1"/>
             </a:lvl7pPr>
             <a:lvl8pPr marL="2400300" indent="0">
               <a:buNone/>
-              <a:defRPr sz="1200" b="1"/>
+              <a:defRPr sz="950" b="1"/>
             </a:lvl8pPr>
             <a:lvl9pPr marL="2743200" indent="0">
               <a:buNone/>
-              <a:defRPr sz="1200" b="1"/>
+              <a:defRPr sz="950" b="1"/>
             </a:lvl9pPr>
           </a:lstStyle>
           <a:p>
@@ -1552,31 +1552,31 @@
           <a:bodyPr/>
           <a:lstStyle>
             <a:lvl1pPr>
-              <a:defRPr sz="1800"/>
+              <a:defRPr sz="1400"/>
             </a:lvl1pPr>
             <a:lvl2pPr>
-              <a:defRPr sz="1500"/>
+              <a:defRPr sz="1150"/>
             </a:lvl2pPr>
             <a:lvl3pPr>
-              <a:defRPr sz="1350"/>
+              <a:defRPr sz="1050"/>
             </a:lvl3pPr>
             <a:lvl4pPr>
-              <a:defRPr sz="1200"/>
+              <a:defRPr sz="950"/>
             </a:lvl4pPr>
             <a:lvl5pPr>
-              <a:defRPr sz="1200"/>
+              <a:defRPr sz="950"/>
             </a:lvl5pPr>
             <a:lvl6pPr>
-              <a:defRPr sz="1200"/>
+              <a:defRPr sz="950"/>
             </a:lvl6pPr>
             <a:lvl7pPr>
-              <a:defRPr sz="1200"/>
+              <a:defRPr sz="950"/>
             </a:lvl7pPr>
             <a:lvl8pPr>
-              <a:defRPr sz="1200"/>
+              <a:defRPr sz="950"/>
             </a:lvl8pPr>
             <a:lvl9pPr>
-              <a:defRPr sz="1200"/>
+              <a:defRPr sz="950"/>
             </a:lvl9pPr>
           </a:lstStyle>
           <a:p>
@@ -1637,39 +1637,39 @@
           <a:lstStyle>
             <a:lvl1pPr marL="0" indent="0">
               <a:buNone/>
-              <a:defRPr sz="1800" b="1"/>
+              <a:defRPr sz="1400" b="1"/>
             </a:lvl1pPr>
             <a:lvl2pPr marL="342900" indent="0">
               <a:buNone/>
-              <a:defRPr sz="1500" b="1"/>
+              <a:defRPr sz="1150" b="1"/>
             </a:lvl2pPr>
             <a:lvl3pPr marL="685800" indent="0">
               <a:buNone/>
-              <a:defRPr sz="1350" b="1"/>
+              <a:defRPr sz="1050" b="1"/>
             </a:lvl3pPr>
             <a:lvl4pPr marL="1028700" indent="0">
               <a:buNone/>
-              <a:defRPr sz="1200" b="1"/>
+              <a:defRPr sz="950" b="1"/>
             </a:lvl4pPr>
             <a:lvl5pPr marL="1371600" indent="0">
               <a:buNone/>
-              <a:defRPr sz="1200" b="1"/>
+              <a:defRPr sz="950" b="1"/>
             </a:lvl5pPr>
             <a:lvl6pPr marL="1714500" indent="0">
               <a:buNone/>
-              <a:defRPr sz="1200" b="1"/>
+              <a:defRPr sz="950" b="1"/>
             </a:lvl6pPr>
             <a:lvl7pPr marL="2057400" indent="0">
               <a:buNone/>
-              <a:defRPr sz="1200" b="1"/>
+              <a:defRPr sz="950" b="1"/>
             </a:lvl7pPr>
             <a:lvl8pPr marL="2400300" indent="0">
               <a:buNone/>
-              <a:defRPr sz="1200" b="1"/>
+              <a:defRPr sz="950" b="1"/>
             </a:lvl8pPr>
             <a:lvl9pPr marL="2743200" indent="0">
               <a:buNone/>
-              <a:defRPr sz="1200" b="1"/>
+              <a:defRPr sz="950" b="1"/>
             </a:lvl9pPr>
           </a:lstStyle>
           <a:p>
@@ -1701,31 +1701,31 @@
           <a:bodyPr/>
           <a:lstStyle>
             <a:lvl1pPr>
-              <a:defRPr sz="1800"/>
+              <a:defRPr sz="1400"/>
             </a:lvl1pPr>
             <a:lvl2pPr>
-              <a:defRPr sz="1500"/>
+              <a:defRPr sz="1150"/>
             </a:lvl2pPr>
             <a:lvl3pPr>
-              <a:defRPr sz="1350"/>
+              <a:defRPr sz="1050"/>
             </a:lvl3pPr>
             <a:lvl4pPr>
-              <a:defRPr sz="1200"/>
+              <a:defRPr sz="950"/>
             </a:lvl4pPr>
             <a:lvl5pPr>
-              <a:defRPr sz="1200"/>
+              <a:defRPr sz="950"/>
             </a:lvl5pPr>
             <a:lvl6pPr>
-              <a:defRPr sz="1200"/>
+              <a:defRPr sz="950"/>
             </a:lvl6pPr>
             <a:lvl7pPr>
-              <a:defRPr sz="1200"/>
+              <a:defRPr sz="950"/>
             </a:lvl7pPr>
             <a:lvl8pPr>
-              <a:defRPr sz="1200"/>
+              <a:defRPr sz="950"/>
             </a:lvl8pPr>
             <a:lvl9pPr>
-              <a:defRPr sz="1200"/>
+              <a:defRPr sz="950"/>
             </a:lvl9pPr>
           </a:lstStyle>
           <a:p>
@@ -2092,7 +2092,7 @@
           <a:bodyPr anchor="b"/>
           <a:lstStyle>
             <a:lvl1pPr algn="l">
-              <a:defRPr sz="1500" b="1"/>
+              <a:defRPr sz="1150" b="1"/>
             </a:lvl1pPr>
           </a:lstStyle>
           <a:p>
@@ -2123,31 +2123,31 @@
           <a:bodyPr/>
           <a:lstStyle>
             <a:lvl1pPr>
-              <a:defRPr sz="2400"/>
+              <a:defRPr sz="1850"/>
             </a:lvl1pPr>
             <a:lvl2pPr>
-              <a:defRPr sz="2100"/>
+              <a:defRPr sz="1650"/>
             </a:lvl2pPr>
             <a:lvl3pPr>
-              <a:defRPr sz="1800"/>
+              <a:defRPr sz="1400"/>
             </a:lvl3pPr>
             <a:lvl4pPr>
-              <a:defRPr sz="1500"/>
+              <a:defRPr sz="1150"/>
             </a:lvl4pPr>
             <a:lvl5pPr>
-              <a:defRPr sz="1500"/>
+              <a:defRPr sz="1150"/>
             </a:lvl5pPr>
             <a:lvl6pPr>
-              <a:defRPr sz="1500"/>
+              <a:defRPr sz="1150"/>
             </a:lvl6pPr>
             <a:lvl7pPr>
-              <a:defRPr sz="1500"/>
+              <a:defRPr sz="1150"/>
             </a:lvl7pPr>
             <a:lvl8pPr>
-              <a:defRPr sz="1500"/>
+              <a:defRPr sz="1150"/>
             </a:lvl8pPr>
             <a:lvl9pPr>
-              <a:defRPr sz="1500"/>
+              <a:defRPr sz="1150"/>
             </a:lvl9pPr>
           </a:lstStyle>
           <a:p>
@@ -2208,39 +2208,39 @@
           <a:lstStyle>
             <a:lvl1pPr marL="0" indent="0">
               <a:buNone/>
-              <a:defRPr sz="1050"/>
+              <a:defRPr sz="800"/>
             </a:lvl1pPr>
             <a:lvl2pPr marL="342900" indent="0">
               <a:buNone/>
-              <a:defRPr sz="900"/>
+              <a:defRPr sz="700"/>
             </a:lvl2pPr>
             <a:lvl3pPr marL="685800" indent="0">
               <a:buNone/>
-              <a:defRPr sz="750"/>
+              <a:defRPr sz="700"/>
             </a:lvl3pPr>
             <a:lvl4pPr marL="1028700" indent="0">
               <a:buNone/>
-              <a:defRPr sz="675"/>
+              <a:defRPr sz="700"/>
             </a:lvl4pPr>
             <a:lvl5pPr marL="1371600" indent="0">
               <a:buNone/>
-              <a:defRPr sz="675"/>
+              <a:defRPr sz="700"/>
             </a:lvl5pPr>
             <a:lvl6pPr marL="1714500" indent="0">
               <a:buNone/>
-              <a:defRPr sz="675"/>
+              <a:defRPr sz="700"/>
             </a:lvl6pPr>
             <a:lvl7pPr marL="2057400" indent="0">
               <a:buNone/>
-              <a:defRPr sz="675"/>
+              <a:defRPr sz="700"/>
             </a:lvl7pPr>
             <a:lvl8pPr marL="2400300" indent="0">
               <a:buNone/>
-              <a:defRPr sz="675"/>
+              <a:defRPr sz="700"/>
             </a:lvl8pPr>
             <a:lvl9pPr marL="2743200" indent="0">
               <a:buNone/>
-              <a:defRPr sz="675"/>
+              <a:defRPr sz="700"/>
             </a:lvl9pPr>
           </a:lstStyle>
           <a:p>
@@ -2367,7 +2367,7 @@
           <a:bodyPr anchor="b"/>
           <a:lstStyle>
             <a:lvl1pPr algn="l">
-              <a:defRPr sz="1500" b="1"/>
+              <a:defRPr sz="1150" b="1"/>
             </a:lvl1pPr>
           </a:lstStyle>
           <a:p>
@@ -2399,39 +2399,39 @@
           <a:lstStyle>
             <a:lvl1pPr marL="0" indent="0">
               <a:buNone/>
-              <a:defRPr sz="2400"/>
+              <a:defRPr sz="1850"/>
             </a:lvl1pPr>
             <a:lvl2pPr marL="342900" indent="0">
               <a:buNone/>
-              <a:defRPr sz="2100"/>
+              <a:defRPr sz="1650"/>
             </a:lvl2pPr>
             <a:lvl3pPr marL="685800" indent="0">
               <a:buNone/>
-              <a:defRPr sz="1800"/>
+              <a:defRPr sz="1400"/>
             </a:lvl3pPr>
             <a:lvl4pPr marL="1028700" indent="0">
               <a:buNone/>
-              <a:defRPr sz="1500"/>
+              <a:defRPr sz="1150"/>
             </a:lvl4pPr>
             <a:lvl5pPr marL="1371600" indent="0">
               <a:buNone/>
-              <a:defRPr sz="1500"/>
+              <a:defRPr sz="1150"/>
             </a:lvl5pPr>
             <a:lvl6pPr marL="1714500" indent="0">
               <a:buNone/>
-              <a:defRPr sz="1500"/>
+              <a:defRPr sz="1150"/>
             </a:lvl6pPr>
             <a:lvl7pPr marL="2057400" indent="0">
               <a:buNone/>
-              <a:defRPr sz="1500"/>
+              <a:defRPr sz="1150"/>
             </a:lvl7pPr>
             <a:lvl8pPr marL="2400300" indent="0">
               <a:buNone/>
-              <a:defRPr sz="1500"/>
+              <a:defRPr sz="1150"/>
             </a:lvl8pPr>
             <a:lvl9pPr marL="2743200" indent="0">
               <a:buNone/>
-              <a:defRPr sz="1500"/>
+              <a:defRPr sz="1150"/>
             </a:lvl9pPr>
           </a:lstStyle>
           <a:p>
@@ -2460,39 +2460,39 @@
           <a:lstStyle>
             <a:lvl1pPr marL="0" indent="0">
               <a:buNone/>
-              <a:defRPr sz="1050"/>
+              <a:defRPr sz="800"/>
             </a:lvl1pPr>
             <a:lvl2pPr marL="342900" indent="0">
               <a:buNone/>
-              <a:defRPr sz="900"/>
+              <a:defRPr sz="700"/>
             </a:lvl2pPr>
             <a:lvl3pPr marL="685800" indent="0">
               <a:buNone/>
-              <a:defRPr sz="750"/>
+              <a:defRPr sz="700"/>
             </a:lvl3pPr>
             <a:lvl4pPr marL="1028700" indent="0">
               <a:buNone/>
-              <a:defRPr sz="675"/>
+              <a:defRPr sz="700"/>
             </a:lvl4pPr>
             <a:lvl5pPr marL="1371600" indent="0">
               <a:buNone/>
-              <a:defRPr sz="675"/>
+              <a:defRPr sz="700"/>
             </a:lvl5pPr>
             <a:lvl6pPr marL="1714500" indent="0">
               <a:buNone/>
-              <a:defRPr sz="675"/>
+              <a:defRPr sz="700"/>
             </a:lvl6pPr>
             <a:lvl7pPr marL="2057400" indent="0">
               <a:buNone/>
-              <a:defRPr sz="675"/>
+              <a:defRPr sz="700"/>
             </a:lvl7pPr>
             <a:lvl8pPr marL="2400300" indent="0">
               <a:buNone/>
-              <a:defRPr sz="675"/>
+              <a:defRPr sz="700"/>
             </a:lvl8pPr>
             <a:lvl9pPr marL="2743200" indent="0">
               <a:buNone/>
-              <a:defRPr sz="675"/>
+              <a:defRPr sz="700"/>
             </a:lvl9pPr>
           </a:lstStyle>
           <a:p>
@@ -2720,7 +2720,7 @@
           <a:bodyPr anchor="ctr" bIns="45720" lIns="91440" rIns="91440" rtlCol="0" tIns="45720" vert="horz"/>
           <a:lstStyle>
             <a:lvl1pPr algn="l">
-              <a:defRPr sz="900">
+              <a:defRPr sz="700">
                 <a:solidFill>
                   <a:schemeClr val="tx1">
                     <a:tint val="75000"/>
@@ -2761,7 +2761,7 @@
           <a:bodyPr anchor="ctr" bIns="45720" lIns="91440" rIns="91440" rtlCol="0" tIns="45720" vert="horz"/>
           <a:lstStyle>
             <a:lvl1pPr algn="ctr">
-              <a:defRPr sz="900">
+              <a:defRPr sz="700">
                 <a:solidFill>
                   <a:schemeClr val="tx1">
                     <a:tint val="75000"/>
@@ -2798,7 +2798,7 @@
           <a:bodyPr anchor="ctr" bIns="45720" lIns="91440" rIns="91440" rtlCol="0" tIns="45720" vert="horz"/>
           <a:lstStyle>
             <a:lvl1pPr algn="r">
-              <a:defRPr sz="900">
+              <a:defRPr sz="700">
                 <a:solidFill>
                   <a:schemeClr val="tx1">
                     <a:tint val="75000"/>
@@ -2844,7 +2844,7 @@
           <a:spcPct val="0"/>
         </a:spcBef>
         <a:buNone/>
-        <a:defRPr kern="1200" sz="3300">
+        <a:defRPr kern="1200" sz="2550">
           <a:solidFill>
             <a:schemeClr val="tx1"/>
           </a:solidFill>
@@ -2861,7 +2861,7 @@
         </a:spcBef>
         <a:buFont typeface="Arial"/>
         <a:buChar char="•"/>
-        <a:defRPr kern="1200" sz="2400">
+        <a:defRPr kern="1200" sz="1850">
           <a:solidFill>
             <a:schemeClr val="tx1"/>
           </a:solidFill>
@@ -2876,7 +2876,7 @@
         </a:spcBef>
         <a:buFont typeface="Arial"/>
         <a:buChar char="–"/>
-        <a:defRPr kern="1200" sz="2100">
+        <a:defRPr kern="1200" sz="1650">
           <a:solidFill>
             <a:schemeClr val="tx1"/>
           </a:solidFill>
@@ -2891,7 +2891,7 @@
         </a:spcBef>
         <a:buFont typeface="Arial"/>
         <a:buChar char="•"/>
-        <a:defRPr kern="1200" sz="1800">
+        <a:defRPr kern="1200" sz="1400">
           <a:solidFill>
             <a:schemeClr val="tx1"/>
           </a:solidFill>
@@ -2906,7 +2906,7 @@
         </a:spcBef>
         <a:buFont typeface="Arial"/>
         <a:buChar char="–"/>
-        <a:defRPr kern="1200" sz="1500">
+        <a:defRPr kern="1200" sz="1150">
           <a:solidFill>
             <a:schemeClr val="tx1"/>
           </a:solidFill>
@@ -2921,7 +2921,7 @@
         </a:spcBef>
         <a:buFont typeface="Arial"/>
         <a:buChar char="»"/>
-        <a:defRPr kern="1200" sz="1500">
+        <a:defRPr kern="1200" sz="1150">
           <a:solidFill>
             <a:schemeClr val="tx1"/>
           </a:solidFill>
@@ -2936,7 +2936,7 @@
         </a:spcBef>
         <a:buFont typeface="Arial"/>
         <a:buChar char="•"/>
-        <a:defRPr kern="1200" sz="1500">
+        <a:defRPr kern="1200" sz="1150">
           <a:solidFill>
             <a:schemeClr val="tx1"/>
           </a:solidFill>
@@ -2951,7 +2951,7 @@
         </a:spcBef>
         <a:buFont typeface="Arial"/>
         <a:buChar char="•"/>
-        <a:defRPr kern="1200" sz="1500">
+        <a:defRPr kern="1200" sz="1150">
           <a:solidFill>
             <a:schemeClr val="tx1"/>
           </a:solidFill>
@@ -2966,7 +2966,7 @@
         </a:spcBef>
         <a:buFont typeface="Arial"/>
         <a:buChar char="•"/>
-        <a:defRPr kern="1200" sz="1500">
+        <a:defRPr kern="1200" sz="1150">
           <a:solidFill>
             <a:schemeClr val="tx1"/>
           </a:solidFill>
@@ -2981,7 +2981,7 @@
         </a:spcBef>
         <a:buFont typeface="Arial"/>
         <a:buChar char="•"/>
-        <a:defRPr kern="1200" sz="1500">
+        <a:defRPr kern="1200" sz="1150">
           <a:solidFill>
             <a:schemeClr val="tx1"/>
           </a:solidFill>
@@ -2996,7 +2996,7 @@
         <a:defRPr lang="en-US"/>
       </a:defPPr>
       <a:lvl1pPr algn="l" defTabSz="342900" eaLnBrk="1" hangingPunct="1" latinLnBrk="0" marL="0" rtl="0">
-        <a:defRPr kern="1200" sz="1350">
+        <a:defRPr kern="1200" sz="1050">
           <a:solidFill>
             <a:schemeClr val="tx1"/>
           </a:solidFill>
@@ -3006,7 +3006,7 @@
         </a:defRPr>
       </a:lvl1pPr>
       <a:lvl2pPr algn="l" defTabSz="342900" eaLnBrk="1" hangingPunct="1" latinLnBrk="0" marL="342900" rtl="0">
-        <a:defRPr kern="1200" sz="1350">
+        <a:defRPr kern="1200" sz="1050">
           <a:solidFill>
             <a:schemeClr val="tx1"/>
           </a:solidFill>
@@ -3016,7 +3016,7 @@
         </a:defRPr>
       </a:lvl2pPr>
       <a:lvl3pPr algn="l" defTabSz="342900" eaLnBrk="1" hangingPunct="1" latinLnBrk="0" marL="685800" rtl="0">
-        <a:defRPr kern="1200" sz="1350">
+        <a:defRPr kern="1200" sz="1050">
           <a:solidFill>
             <a:schemeClr val="tx1"/>
           </a:solidFill>
@@ -3026,7 +3026,7 @@
         </a:defRPr>
       </a:lvl3pPr>
       <a:lvl4pPr algn="l" defTabSz="342900" eaLnBrk="1" hangingPunct="1" latinLnBrk="0" marL="1028700" rtl="0">
-        <a:defRPr kern="1200" sz="1350">
+        <a:defRPr kern="1200" sz="1050">
           <a:solidFill>
             <a:schemeClr val="tx1"/>
           </a:solidFill>
@@ -3036,7 +3036,7 @@
         </a:defRPr>
       </a:lvl4pPr>
       <a:lvl5pPr algn="l" defTabSz="342900" eaLnBrk="1" hangingPunct="1" latinLnBrk="0" marL="1371600" rtl="0">
-        <a:defRPr kern="1200" sz="1350">
+        <a:defRPr kern="1200" sz="1050">
           <a:solidFill>
             <a:schemeClr val="tx1"/>
           </a:solidFill>
@@ -3046,7 +3046,7 @@
         </a:defRPr>
       </a:lvl5pPr>
       <a:lvl6pPr algn="l" defTabSz="342900" eaLnBrk="1" hangingPunct="1" latinLnBrk="0" marL="1714500" rtl="0">
-        <a:defRPr kern="1200" sz="1350">
+        <a:defRPr kern="1200" sz="1050">
           <a:solidFill>
             <a:schemeClr val="tx1"/>
           </a:solidFill>
@@ -3056,7 +3056,7 @@
         </a:defRPr>
       </a:lvl6pPr>
       <a:lvl7pPr algn="l" defTabSz="342900" eaLnBrk="1" hangingPunct="1" latinLnBrk="0" marL="2057400" rtl="0">
-        <a:defRPr kern="1200" sz="1350">
+        <a:defRPr kern="1200" sz="1050">
           <a:solidFill>
             <a:schemeClr val="tx1"/>
           </a:solidFill>
@@ -3066,7 +3066,7 @@
         </a:defRPr>
       </a:lvl7pPr>
       <a:lvl8pPr algn="l" defTabSz="342900" eaLnBrk="1" hangingPunct="1" latinLnBrk="0" marL="2400300" rtl="0">
-        <a:defRPr kern="1200" sz="1350">
+        <a:defRPr kern="1200" sz="1050">
           <a:solidFill>
             <a:schemeClr val="tx1"/>
           </a:solidFill>
@@ -3076,7 +3076,7 @@
         </a:defRPr>
       </a:lvl8pPr>
       <a:lvl9pPr algn="l" defTabSz="342900" eaLnBrk="1" hangingPunct="1" latinLnBrk="0" marL="2743200" rtl="0">
-        <a:defRPr kern="1200" sz="1350">
+        <a:defRPr kern="1200" sz="1050">
           <a:solidFill>
             <a:schemeClr val="tx1"/>
           </a:solidFill>

--- a/12-group-presentations/slides.pptx
+++ b/12-group-presentations/slides.pptx
@@ -931,7 +931,7 @@
           <a:bodyPr anchor="t"/>
           <a:lstStyle>
             <a:lvl1pPr algn="l">
-              <a:defRPr sz="2350" b="1" cap="all"/>
+              <a:defRPr sz="1850" b="1" cap="all"/>
             </a:lvl1pPr>
           </a:lstStyle>
           <a:p>
@@ -963,7 +963,7 @@
           <a:lstStyle>
             <a:lvl1pPr marL="0" indent="0">
               <a:buNone/>
-              <a:defRPr sz="1150">
+              <a:defRPr sz="950">
                 <a:solidFill>
                   <a:schemeClr val="tx1">
                     <a:tint val="75000"/>
@@ -973,7 +973,7 @@
             </a:lvl1pPr>
             <a:lvl2pPr marL="342900" indent="0">
               <a:buNone/>
-              <a:defRPr sz="1050">
+              <a:defRPr sz="850">
                 <a:solidFill>
                   <a:schemeClr val="tx1">
                     <a:tint val="75000"/>
@@ -983,7 +983,7 @@
             </a:lvl2pPr>
             <a:lvl3pPr marL="685800" indent="0">
               <a:buNone/>
-              <a:defRPr sz="950">
+              <a:defRPr sz="750">
                 <a:solidFill>
                   <a:schemeClr val="tx1">
                     <a:tint val="75000"/>
@@ -993,7 +993,7 @@
             </a:lvl3pPr>
             <a:lvl4pPr marL="1028700" indent="0">
               <a:buNone/>
-              <a:defRPr sz="800">
+              <a:defRPr sz="650">
                 <a:solidFill>
                   <a:schemeClr val="tx1">
                     <a:tint val="75000"/>
@@ -1003,7 +1003,7 @@
             </a:lvl4pPr>
             <a:lvl5pPr marL="1371600" indent="0">
               <a:buNone/>
-              <a:defRPr sz="800">
+              <a:defRPr sz="650">
                 <a:solidFill>
                   <a:schemeClr val="tx1">
                     <a:tint val="75000"/>
@@ -1013,7 +1013,7 @@
             </a:lvl5pPr>
             <a:lvl6pPr marL="1714500" indent="0">
               <a:buNone/>
-              <a:defRPr sz="800">
+              <a:defRPr sz="650">
                 <a:solidFill>
                   <a:schemeClr val="tx1">
                     <a:tint val="75000"/>
@@ -1023,7 +1023,7 @@
             </a:lvl6pPr>
             <a:lvl7pPr marL="2057400" indent="0">
               <a:buNone/>
-              <a:defRPr sz="800">
+              <a:defRPr sz="650">
                 <a:solidFill>
                   <a:schemeClr val="tx1">
                     <a:tint val="75000"/>
@@ -1033,7 +1033,7 @@
             </a:lvl7pPr>
             <a:lvl8pPr marL="2400300" indent="0">
               <a:buNone/>
-              <a:defRPr sz="800">
+              <a:defRPr sz="650">
                 <a:solidFill>
                   <a:schemeClr val="tx1">
                     <a:tint val="75000"/>
@@ -1043,7 +1043,7 @@
             </a:lvl8pPr>
             <a:lvl9pPr marL="2743200" indent="0">
               <a:buNone/>
-              <a:defRPr sz="800">
+              <a:defRPr sz="650">
                 <a:solidFill>
                   <a:schemeClr val="tx1">
                     <a:tint val="75000"/>
@@ -1198,31 +1198,31 @@
           <a:bodyPr/>
           <a:lstStyle>
             <a:lvl1pPr>
-              <a:defRPr sz="1650"/>
+              <a:defRPr sz="1300"/>
             </a:lvl1pPr>
             <a:lvl2pPr>
-              <a:defRPr sz="1400"/>
+              <a:defRPr sz="1100"/>
             </a:lvl2pPr>
             <a:lvl3pPr>
-              <a:defRPr sz="1150"/>
+              <a:defRPr sz="950"/>
             </a:lvl3pPr>
             <a:lvl4pPr>
-              <a:defRPr sz="1050"/>
+              <a:defRPr sz="850"/>
             </a:lvl4pPr>
             <a:lvl5pPr>
-              <a:defRPr sz="1050"/>
+              <a:defRPr sz="850"/>
             </a:lvl5pPr>
             <a:lvl6pPr>
-              <a:defRPr sz="1050"/>
+              <a:defRPr sz="850"/>
             </a:lvl6pPr>
             <a:lvl7pPr>
-              <a:defRPr sz="1050"/>
+              <a:defRPr sz="850"/>
             </a:lvl7pPr>
             <a:lvl8pPr>
-              <a:defRPr sz="1050"/>
+              <a:defRPr sz="850"/>
             </a:lvl8pPr>
             <a:lvl9pPr>
-              <a:defRPr sz="1050"/>
+              <a:defRPr sz="850"/>
             </a:lvl9pPr>
           </a:lstStyle>
           <a:p>
@@ -1282,31 +1282,31 @@
           <a:bodyPr/>
           <a:lstStyle>
             <a:lvl1pPr>
-              <a:defRPr sz="1650"/>
+              <a:defRPr sz="1300"/>
             </a:lvl1pPr>
             <a:lvl2pPr>
-              <a:defRPr sz="1400"/>
+              <a:defRPr sz="1100"/>
             </a:lvl2pPr>
             <a:lvl3pPr>
-              <a:defRPr sz="1150"/>
+              <a:defRPr sz="950"/>
             </a:lvl3pPr>
             <a:lvl4pPr>
-              <a:defRPr sz="1050"/>
+              <a:defRPr sz="850"/>
             </a:lvl4pPr>
             <a:lvl5pPr>
-              <a:defRPr sz="1050"/>
+              <a:defRPr sz="850"/>
             </a:lvl5pPr>
             <a:lvl6pPr>
-              <a:defRPr sz="1050"/>
+              <a:defRPr sz="850"/>
             </a:lvl6pPr>
             <a:lvl7pPr>
-              <a:defRPr sz="1050"/>
+              <a:defRPr sz="850"/>
             </a:lvl7pPr>
             <a:lvl8pPr>
-              <a:defRPr sz="1050"/>
+              <a:defRPr sz="850"/>
             </a:lvl8pPr>
             <a:lvl9pPr>
-              <a:defRPr sz="1050"/>
+              <a:defRPr sz="850"/>
             </a:lvl9pPr>
           </a:lstStyle>
           <a:p>
@@ -1488,39 +1488,39 @@
           <a:lstStyle>
             <a:lvl1pPr marL="0" indent="0">
               <a:buNone/>
-              <a:defRPr sz="1400" b="1"/>
+              <a:defRPr sz="1100" b="1"/>
             </a:lvl1pPr>
             <a:lvl2pPr marL="342900" indent="0">
               <a:buNone/>
-              <a:defRPr sz="1150" b="1"/>
+              <a:defRPr sz="950" b="1"/>
             </a:lvl2pPr>
             <a:lvl3pPr marL="685800" indent="0">
               <a:buNone/>
-              <a:defRPr sz="1050" b="1"/>
+              <a:defRPr sz="850" b="1"/>
             </a:lvl3pPr>
             <a:lvl4pPr marL="1028700" indent="0">
               <a:buNone/>
-              <a:defRPr sz="950" b="1"/>
+              <a:defRPr sz="750" b="1"/>
             </a:lvl4pPr>
             <a:lvl5pPr marL="1371600" indent="0">
               <a:buNone/>
-              <a:defRPr sz="950" b="1"/>
+              <a:defRPr sz="750" b="1"/>
             </a:lvl5pPr>
             <a:lvl6pPr marL="1714500" indent="0">
               <a:buNone/>
-              <a:defRPr sz="950" b="1"/>
+              <a:defRPr sz="750" b="1"/>
             </a:lvl6pPr>
             <a:lvl7pPr marL="2057400" indent="0">
               <a:buNone/>
-              <a:defRPr sz="950" b="1"/>
+              <a:defRPr sz="750" b="1"/>
             </a:lvl7pPr>
             <a:lvl8pPr marL="2400300" indent="0">
               <a:buNone/>
-              <a:defRPr sz="950" b="1"/>
+              <a:defRPr sz="750" b="1"/>
             </a:lvl8pPr>
             <a:lvl9pPr marL="2743200" indent="0">
               <a:buNone/>
-              <a:defRPr sz="950" b="1"/>
+              <a:defRPr sz="750" b="1"/>
             </a:lvl9pPr>
           </a:lstStyle>
           <a:p>
@@ -1552,31 +1552,31 @@
           <a:bodyPr/>
           <a:lstStyle>
             <a:lvl1pPr>
-              <a:defRPr sz="1400"/>
+              <a:defRPr sz="1100"/>
             </a:lvl1pPr>
             <a:lvl2pPr>
-              <a:defRPr sz="1150"/>
+              <a:defRPr sz="950"/>
             </a:lvl2pPr>
             <a:lvl3pPr>
-              <a:defRPr sz="1050"/>
+              <a:defRPr sz="850"/>
             </a:lvl3pPr>
             <a:lvl4pPr>
-              <a:defRPr sz="950"/>
+              <a:defRPr sz="750"/>
             </a:lvl4pPr>
             <a:lvl5pPr>
-              <a:defRPr sz="950"/>
+              <a:defRPr sz="750"/>
             </a:lvl5pPr>
             <a:lvl6pPr>
-              <a:defRPr sz="950"/>
+              <a:defRPr sz="750"/>
             </a:lvl6pPr>
             <a:lvl7pPr>
-              <a:defRPr sz="950"/>
+              <a:defRPr sz="750"/>
             </a:lvl7pPr>
             <a:lvl8pPr>
-              <a:defRPr sz="950"/>
+              <a:defRPr sz="750"/>
             </a:lvl8pPr>
             <a:lvl9pPr>
-              <a:defRPr sz="950"/>
+              <a:defRPr sz="750"/>
             </a:lvl9pPr>
           </a:lstStyle>
           <a:p>
@@ -1637,39 +1637,39 @@
           <a:lstStyle>
             <a:lvl1pPr marL="0" indent="0">
               <a:buNone/>
-              <a:defRPr sz="1400" b="1"/>
+              <a:defRPr sz="1100" b="1"/>
             </a:lvl1pPr>
             <a:lvl2pPr marL="342900" indent="0">
               <a:buNone/>
-              <a:defRPr sz="1150" b="1"/>
+              <a:defRPr sz="950" b="1"/>
             </a:lvl2pPr>
             <a:lvl3pPr marL="685800" indent="0">
               <a:buNone/>
-              <a:defRPr sz="1050" b="1"/>
+              <a:defRPr sz="850" b="1"/>
             </a:lvl3pPr>
             <a:lvl4pPr marL="1028700" indent="0">
               <a:buNone/>
-              <a:defRPr sz="950" b="1"/>
+              <a:defRPr sz="750" b="1"/>
             </a:lvl4pPr>
             <a:lvl5pPr marL="1371600" indent="0">
               <a:buNone/>
-              <a:defRPr sz="950" b="1"/>
+              <a:defRPr sz="750" b="1"/>
             </a:lvl5pPr>
             <a:lvl6pPr marL="1714500" indent="0">
               <a:buNone/>
-              <a:defRPr sz="950" b="1"/>
+              <a:defRPr sz="750" b="1"/>
             </a:lvl6pPr>
             <a:lvl7pPr marL="2057400" indent="0">
               <a:buNone/>
-              <a:defRPr sz="950" b="1"/>
+              <a:defRPr sz="750" b="1"/>
             </a:lvl7pPr>
             <a:lvl8pPr marL="2400300" indent="0">
               <a:buNone/>
-              <a:defRPr sz="950" b="1"/>
+              <a:defRPr sz="750" b="1"/>
             </a:lvl8pPr>
             <a:lvl9pPr marL="2743200" indent="0">
               <a:buNone/>
-              <a:defRPr sz="950" b="1"/>
+              <a:defRPr sz="750" b="1"/>
             </a:lvl9pPr>
           </a:lstStyle>
           <a:p>
@@ -1701,31 +1701,31 @@
           <a:bodyPr/>
           <a:lstStyle>
             <a:lvl1pPr>
-              <a:defRPr sz="1400"/>
+              <a:defRPr sz="1100"/>
             </a:lvl1pPr>
             <a:lvl2pPr>
-              <a:defRPr sz="1150"/>
+              <a:defRPr sz="950"/>
             </a:lvl2pPr>
             <a:lvl3pPr>
-              <a:defRPr sz="1050"/>
+              <a:defRPr sz="850"/>
             </a:lvl3pPr>
             <a:lvl4pPr>
-              <a:defRPr sz="950"/>
+              <a:defRPr sz="750"/>
             </a:lvl4pPr>
             <a:lvl5pPr>
-              <a:defRPr sz="950"/>
+              <a:defRPr sz="750"/>
             </a:lvl5pPr>
             <a:lvl6pPr>
-              <a:defRPr sz="950"/>
+              <a:defRPr sz="750"/>
             </a:lvl6pPr>
             <a:lvl7pPr>
-              <a:defRPr sz="950"/>
+              <a:defRPr sz="750"/>
             </a:lvl7pPr>
             <a:lvl8pPr>
-              <a:defRPr sz="950"/>
+              <a:defRPr sz="750"/>
             </a:lvl8pPr>
             <a:lvl9pPr>
-              <a:defRPr sz="950"/>
+              <a:defRPr sz="750"/>
             </a:lvl9pPr>
           </a:lstStyle>
           <a:p>
@@ -2092,7 +2092,7 @@
           <a:bodyPr anchor="b"/>
           <a:lstStyle>
             <a:lvl1pPr algn="l">
-              <a:defRPr sz="1150" b="1"/>
+              <a:defRPr sz="950" b="1"/>
             </a:lvl1pPr>
           </a:lstStyle>
           <a:p>
@@ -2123,31 +2123,31 @@
           <a:bodyPr/>
           <a:lstStyle>
             <a:lvl1pPr>
-              <a:defRPr sz="1850"/>
+              <a:defRPr sz="1500"/>
             </a:lvl1pPr>
             <a:lvl2pPr>
-              <a:defRPr sz="1650"/>
+              <a:defRPr sz="1300"/>
             </a:lvl2pPr>
             <a:lvl3pPr>
-              <a:defRPr sz="1400"/>
+              <a:defRPr sz="1100"/>
             </a:lvl3pPr>
             <a:lvl4pPr>
-              <a:defRPr sz="1150"/>
+              <a:defRPr sz="950"/>
             </a:lvl4pPr>
             <a:lvl5pPr>
-              <a:defRPr sz="1150"/>
+              <a:defRPr sz="950"/>
             </a:lvl5pPr>
             <a:lvl6pPr>
-              <a:defRPr sz="1150"/>
+              <a:defRPr sz="950"/>
             </a:lvl6pPr>
             <a:lvl7pPr>
-              <a:defRPr sz="1150"/>
+              <a:defRPr sz="950"/>
             </a:lvl7pPr>
             <a:lvl8pPr>
-              <a:defRPr sz="1150"/>
+              <a:defRPr sz="950"/>
             </a:lvl8pPr>
             <a:lvl9pPr>
-              <a:defRPr sz="1150"/>
+              <a:defRPr sz="950"/>
             </a:lvl9pPr>
           </a:lstStyle>
           <a:p>
@@ -2208,39 +2208,39 @@
           <a:lstStyle>
             <a:lvl1pPr marL="0" indent="0">
               <a:buNone/>
-              <a:defRPr sz="800"/>
+              <a:defRPr sz="650"/>
             </a:lvl1pPr>
             <a:lvl2pPr marL="342900" indent="0">
               <a:buNone/>
-              <a:defRPr sz="700"/>
+              <a:defRPr sz="550"/>
             </a:lvl2pPr>
             <a:lvl3pPr marL="685800" indent="0">
               <a:buNone/>
-              <a:defRPr sz="700"/>
+              <a:defRPr sz="550"/>
             </a:lvl3pPr>
             <a:lvl4pPr marL="1028700" indent="0">
               <a:buNone/>
-              <a:defRPr sz="700"/>
+              <a:defRPr sz="550"/>
             </a:lvl4pPr>
             <a:lvl5pPr marL="1371600" indent="0">
               <a:buNone/>
-              <a:defRPr sz="700"/>
+              <a:defRPr sz="550"/>
             </a:lvl5pPr>
             <a:lvl6pPr marL="1714500" indent="0">
               <a:buNone/>
-              <a:defRPr sz="700"/>
+              <a:defRPr sz="550"/>
             </a:lvl6pPr>
             <a:lvl7pPr marL="2057400" indent="0">
               <a:buNone/>
-              <a:defRPr sz="700"/>
+              <a:defRPr sz="550"/>
             </a:lvl7pPr>
             <a:lvl8pPr marL="2400300" indent="0">
               <a:buNone/>
-              <a:defRPr sz="700"/>
+              <a:defRPr sz="550"/>
             </a:lvl8pPr>
             <a:lvl9pPr marL="2743200" indent="0">
               <a:buNone/>
-              <a:defRPr sz="700"/>
+              <a:defRPr sz="550"/>
             </a:lvl9pPr>
           </a:lstStyle>
           <a:p>
@@ -2367,7 +2367,7 @@
           <a:bodyPr anchor="b"/>
           <a:lstStyle>
             <a:lvl1pPr algn="l">
-              <a:defRPr sz="1150" b="1"/>
+              <a:defRPr sz="950" b="1"/>
             </a:lvl1pPr>
           </a:lstStyle>
           <a:p>
@@ -2399,39 +2399,39 @@
           <a:lstStyle>
             <a:lvl1pPr marL="0" indent="0">
               <a:buNone/>
-              <a:defRPr sz="1850"/>
+              <a:defRPr sz="1500"/>
             </a:lvl1pPr>
             <a:lvl2pPr marL="342900" indent="0">
               <a:buNone/>
-              <a:defRPr sz="1650"/>
+              <a:defRPr sz="1300"/>
             </a:lvl2pPr>
             <a:lvl3pPr marL="685800" indent="0">
               <a:buNone/>
-              <a:defRPr sz="1400"/>
+              <a:defRPr sz="1100"/>
             </a:lvl3pPr>
             <a:lvl4pPr marL="1028700" indent="0">
               <a:buNone/>
-              <a:defRPr sz="1150"/>
+              <a:defRPr sz="950"/>
             </a:lvl4pPr>
             <a:lvl5pPr marL="1371600" indent="0">
               <a:buNone/>
-              <a:defRPr sz="1150"/>
+              <a:defRPr sz="950"/>
             </a:lvl5pPr>
             <a:lvl6pPr marL="1714500" indent="0">
               <a:buNone/>
-              <a:defRPr sz="1150"/>
+              <a:defRPr sz="950"/>
             </a:lvl6pPr>
             <a:lvl7pPr marL="2057400" indent="0">
               <a:buNone/>
-              <a:defRPr sz="1150"/>
+              <a:defRPr sz="950"/>
             </a:lvl7pPr>
             <a:lvl8pPr marL="2400300" indent="0">
               <a:buNone/>
-              <a:defRPr sz="1150"/>
+              <a:defRPr sz="950"/>
             </a:lvl8pPr>
             <a:lvl9pPr marL="2743200" indent="0">
               <a:buNone/>
-              <a:defRPr sz="1150"/>
+              <a:defRPr sz="950"/>
             </a:lvl9pPr>
           </a:lstStyle>
           <a:p>
@@ -2460,39 +2460,39 @@
           <a:lstStyle>
             <a:lvl1pPr marL="0" indent="0">
               <a:buNone/>
-              <a:defRPr sz="800"/>
+              <a:defRPr sz="650"/>
             </a:lvl1pPr>
             <a:lvl2pPr marL="342900" indent="0">
               <a:buNone/>
-              <a:defRPr sz="700"/>
+              <a:defRPr sz="550"/>
             </a:lvl2pPr>
             <a:lvl3pPr marL="685800" indent="0">
               <a:buNone/>
-              <a:defRPr sz="700"/>
+              <a:defRPr sz="550"/>
             </a:lvl3pPr>
             <a:lvl4pPr marL="1028700" indent="0">
               <a:buNone/>
-              <a:defRPr sz="700"/>
+              <a:defRPr sz="550"/>
             </a:lvl4pPr>
             <a:lvl5pPr marL="1371600" indent="0">
               <a:buNone/>
-              <a:defRPr sz="700"/>
+              <a:defRPr sz="550"/>
             </a:lvl5pPr>
             <a:lvl6pPr marL="1714500" indent="0">
               <a:buNone/>
-              <a:defRPr sz="700"/>
+              <a:defRPr sz="550"/>
             </a:lvl6pPr>
             <a:lvl7pPr marL="2057400" indent="0">
               <a:buNone/>
-              <a:defRPr sz="700"/>
+              <a:defRPr sz="550"/>
             </a:lvl7pPr>
             <a:lvl8pPr marL="2400300" indent="0">
               <a:buNone/>
-              <a:defRPr sz="700"/>
+              <a:defRPr sz="550"/>
             </a:lvl8pPr>
             <a:lvl9pPr marL="2743200" indent="0">
               <a:buNone/>
-              <a:defRPr sz="700"/>
+              <a:defRPr sz="550"/>
             </a:lvl9pPr>
           </a:lstStyle>
           <a:p>
@@ -2720,7 +2720,7 @@
           <a:bodyPr anchor="ctr" bIns="45720" lIns="91440" rIns="91440" rtlCol="0" tIns="45720" vert="horz"/>
           <a:lstStyle>
             <a:lvl1pPr algn="l">
-              <a:defRPr sz="700">
+              <a:defRPr sz="550">
                 <a:solidFill>
                   <a:schemeClr val="tx1">
                     <a:tint val="75000"/>
@@ -2761,7 +2761,7 @@
           <a:bodyPr anchor="ctr" bIns="45720" lIns="91440" rIns="91440" rtlCol="0" tIns="45720" vert="horz"/>
           <a:lstStyle>
             <a:lvl1pPr algn="ctr">
-              <a:defRPr sz="700">
+              <a:defRPr sz="550">
                 <a:solidFill>
                   <a:schemeClr val="tx1">
                     <a:tint val="75000"/>
@@ -2798,7 +2798,7 @@
           <a:bodyPr anchor="ctr" bIns="45720" lIns="91440" rIns="91440" rtlCol="0" tIns="45720" vert="horz"/>
           <a:lstStyle>
             <a:lvl1pPr algn="r">
-              <a:defRPr sz="700">
+              <a:defRPr sz="550">
                 <a:solidFill>
                   <a:schemeClr val="tx1">
                     <a:tint val="75000"/>
@@ -2844,7 +2844,7 @@
           <a:spcPct val="0"/>
         </a:spcBef>
         <a:buNone/>
-        <a:defRPr kern="1200" sz="2550">
+        <a:defRPr kern="1200" sz="2050">
           <a:solidFill>
             <a:schemeClr val="tx1"/>
           </a:solidFill>
@@ -2861,7 +2861,7 @@
         </a:spcBef>
         <a:buFont typeface="Arial"/>
         <a:buChar char="•"/>
-        <a:defRPr kern="1200" sz="1850">
+        <a:defRPr kern="1200" sz="1500">
           <a:solidFill>
             <a:schemeClr val="tx1"/>
           </a:solidFill>
@@ -2876,7 +2876,7 @@
         </a:spcBef>
         <a:buFont typeface="Arial"/>
         <a:buChar char="–"/>
-        <a:defRPr kern="1200" sz="1650">
+        <a:defRPr kern="1200" sz="1300">
           <a:solidFill>
             <a:schemeClr val="tx1"/>
           </a:solidFill>
@@ -2891,7 +2891,7 @@
         </a:spcBef>
         <a:buFont typeface="Arial"/>
         <a:buChar char="•"/>
-        <a:defRPr kern="1200" sz="1400">
+        <a:defRPr kern="1200" sz="1100">
           <a:solidFill>
             <a:schemeClr val="tx1"/>
           </a:solidFill>
@@ -2906,7 +2906,7 @@
         </a:spcBef>
         <a:buFont typeface="Arial"/>
         <a:buChar char="–"/>
-        <a:defRPr kern="1200" sz="1150">
+        <a:defRPr kern="1200" sz="950">
           <a:solidFill>
             <a:schemeClr val="tx1"/>
           </a:solidFill>
@@ -2921,7 +2921,7 @@
         </a:spcBef>
         <a:buFont typeface="Arial"/>
         <a:buChar char="»"/>
-        <a:defRPr kern="1200" sz="1150">
+        <a:defRPr kern="1200" sz="950">
           <a:solidFill>
             <a:schemeClr val="tx1"/>
           </a:solidFill>
@@ -2936,7 +2936,7 @@
         </a:spcBef>
         <a:buFont typeface="Arial"/>
         <a:buChar char="•"/>
-        <a:defRPr kern="1200" sz="1150">
+        <a:defRPr kern="1200" sz="950">
           <a:solidFill>
             <a:schemeClr val="tx1"/>
           </a:solidFill>
@@ -2951,7 +2951,7 @@
         </a:spcBef>
         <a:buFont typeface="Arial"/>
         <a:buChar char="•"/>
-        <a:defRPr kern="1200" sz="1150">
+        <a:defRPr kern="1200" sz="950">
           <a:solidFill>
             <a:schemeClr val="tx1"/>
           </a:solidFill>
@@ -2966,7 +2966,7 @@
         </a:spcBef>
         <a:buFont typeface="Arial"/>
         <a:buChar char="•"/>
-        <a:defRPr kern="1200" sz="1150">
+        <a:defRPr kern="1200" sz="950">
           <a:solidFill>
             <a:schemeClr val="tx1"/>
           </a:solidFill>
@@ -2981,7 +2981,7 @@
         </a:spcBef>
         <a:buFont typeface="Arial"/>
         <a:buChar char="•"/>
-        <a:defRPr kern="1200" sz="1150">
+        <a:defRPr kern="1200" sz="950">
           <a:solidFill>
             <a:schemeClr val="tx1"/>
           </a:solidFill>
@@ -2996,7 +2996,7 @@
         <a:defRPr lang="en-US"/>
       </a:defPPr>
       <a:lvl1pPr algn="l" defTabSz="342900" eaLnBrk="1" hangingPunct="1" latinLnBrk="0" marL="0" rtl="0">
-        <a:defRPr kern="1200" sz="1050">
+        <a:defRPr kern="1200" sz="850">
           <a:solidFill>
             <a:schemeClr val="tx1"/>
           </a:solidFill>
@@ -3006,7 +3006,7 @@
         </a:defRPr>
       </a:lvl1pPr>
       <a:lvl2pPr algn="l" defTabSz="342900" eaLnBrk="1" hangingPunct="1" latinLnBrk="0" marL="342900" rtl="0">
-        <a:defRPr kern="1200" sz="1050">
+        <a:defRPr kern="1200" sz="850">
           <a:solidFill>
             <a:schemeClr val="tx1"/>
           </a:solidFill>
@@ -3016,7 +3016,7 @@
         </a:defRPr>
       </a:lvl2pPr>
       <a:lvl3pPr algn="l" defTabSz="342900" eaLnBrk="1" hangingPunct="1" latinLnBrk="0" marL="685800" rtl="0">
-        <a:defRPr kern="1200" sz="1050">
+        <a:defRPr kern="1200" sz="850">
           <a:solidFill>
             <a:schemeClr val="tx1"/>
           </a:solidFill>
@@ -3026,7 +3026,7 @@
         </a:defRPr>
       </a:lvl3pPr>
       <a:lvl4pPr algn="l" defTabSz="342900" eaLnBrk="1" hangingPunct="1" latinLnBrk="0" marL="1028700" rtl="0">
-        <a:defRPr kern="1200" sz="1050">
+        <a:defRPr kern="1200" sz="850">
           <a:solidFill>
             <a:schemeClr val="tx1"/>
           </a:solidFill>
@@ -3036,7 +3036,7 @@
         </a:defRPr>
       </a:lvl4pPr>
       <a:lvl5pPr algn="l" defTabSz="342900" eaLnBrk="1" hangingPunct="1" latinLnBrk="0" marL="1371600" rtl="0">
-        <a:defRPr kern="1200" sz="1050">
+        <a:defRPr kern="1200" sz="850">
           <a:solidFill>
             <a:schemeClr val="tx1"/>
           </a:solidFill>
@@ -3046,7 +3046,7 @@
         </a:defRPr>
       </a:lvl5pPr>
       <a:lvl6pPr algn="l" defTabSz="342900" eaLnBrk="1" hangingPunct="1" latinLnBrk="0" marL="1714500" rtl="0">
-        <a:defRPr kern="1200" sz="1050">
+        <a:defRPr kern="1200" sz="850">
           <a:solidFill>
             <a:schemeClr val="tx1"/>
           </a:solidFill>
@@ -3056,7 +3056,7 @@
         </a:defRPr>
       </a:lvl6pPr>
       <a:lvl7pPr algn="l" defTabSz="342900" eaLnBrk="1" hangingPunct="1" latinLnBrk="0" marL="2057400" rtl="0">
-        <a:defRPr kern="1200" sz="1050">
+        <a:defRPr kern="1200" sz="850">
           <a:solidFill>
             <a:schemeClr val="tx1"/>
           </a:solidFill>
@@ -3066,7 +3066,7 @@
         </a:defRPr>
       </a:lvl7pPr>
       <a:lvl8pPr algn="l" defTabSz="342900" eaLnBrk="1" hangingPunct="1" latinLnBrk="0" marL="2400300" rtl="0">
-        <a:defRPr kern="1200" sz="1050">
+        <a:defRPr kern="1200" sz="850">
           <a:solidFill>
             <a:schemeClr val="tx1"/>
           </a:solidFill>
@@ -3076,7 +3076,7 @@
         </a:defRPr>
       </a:lvl8pPr>
       <a:lvl9pPr algn="l" defTabSz="342900" eaLnBrk="1" hangingPunct="1" latinLnBrk="0" marL="2743200" rtl="0">
-        <a:defRPr kern="1200" sz="1050">
+        <a:defRPr kern="1200" sz="850">
           <a:solidFill>
             <a:schemeClr val="tx1"/>
           </a:solidFill>

--- a/12-group-presentations/slides.pptx
+++ b/12-group-presentations/slides.pptx
@@ -2813,6 +2813,72 @@
               <a:t>‹#›</a:t>
             </a:fld>
             <a:endParaRPr lang="en-US"/>
+          </a:p>
+        </p:txBody>
+      </p:sp>
+      <p:sp>
+        <p:nvSpPr>
+          <p:cNvPr id="7" name="Author Footer"/>
+          <p:cNvSpPr txBox="1"/>
+          <p:nvPr/>
+        </p:nvSpPr>
+        <p:spPr>
+          <a:xfrm>
+            <a:off x="457200" y="4735000"/>
+            <a:ext cx="5000000" cy="260000"/>
+          </a:xfrm>
+          <a:prstGeom prst="rect">
+            <a:avLst/>
+          </a:prstGeom>
+          <a:noFill/>
+        </p:spPr>
+        <p:txBody>
+          <a:bodyPr anchor="ctr" bIns="0" lIns="0" rIns="0" tIns="0" wrap="square"/>
+          <a:lstStyle/>
+          <a:p>
+            <a:pPr algn="l"/>
+            <a:r>
+              <a:rPr dirty="0" lang="en-US" sz="900">
+                <a:solidFill>
+                  <a:srgbClr val="6E7275"/>
+                </a:solidFill>
+                <a:latin typeface="+mn-lt"/>
+              </a:rPr>
+              <a:t>Thierry Warin, PhD</a:t>
+            </a:r>
+          </a:p>
+        </p:txBody>
+      </p:sp>
+      <p:sp>
+        <p:nvSpPr>
+          <p:cNvPr id="8" name="Slide Number Footer"/>
+          <p:cNvSpPr txBox="1"/>
+          <p:nvPr/>
+        </p:nvSpPr>
+        <p:spPr>
+          <a:xfrm>
+            <a:off x="7200000" y="4735000"/>
+            <a:ext cx="1486800" cy="260000"/>
+          </a:xfrm>
+          <a:prstGeom prst="rect">
+            <a:avLst/>
+          </a:prstGeom>
+          <a:noFill/>
+        </p:spPr>
+        <p:txBody>
+          <a:bodyPr anchor="ctr" bIns="0" lIns="0" rIns="0" tIns="0" wrap="square"/>
+          <a:lstStyle/>
+          <a:p>
+            <a:pPr algn="r"/>
+            <a:fld id="{9B1A2C3D-4E5F-6A7B-8C9D-0E1F2A3B4C5D}" type="slidenum">
+              <a:rPr dirty="0" lang="en-US" sz="900">
+                <a:solidFill>
+                  <a:srgbClr val="6E7275"/>
+                </a:solidFill>
+                <a:latin typeface="+mn-lt"/>
+              </a:rPr>
+              <a:t>2</a:t>
+            </a:fld>
           </a:p>
         </p:txBody>
       </p:sp>
@@ -3193,7 +3259,7 @@
             </a:pPr>
             <a:r>
               <a:rPr/>
-              <a:t>18 August 2026</a:t>
+              <a:t>19 August 2026</a:t>
             </a:r>
           </a:p>
         </p:txBody>

--- a/12-group-presentations/slides.pptx
+++ b/12-group-presentations/slides.pptx
@@ -3259,7 +3259,7 @@
             </a:pPr>
             <a:r>
               <a:rPr/>
-              <a:t>19 August 2026</a:t>
+              <a:t>20 August 2026</a:t>
             </a:r>
           </a:p>
         </p:txBody>
@@ -3903,7 +3903,7 @@
             <a:pPr lvl="0"/>
             <a:r>
               <a:rPr/>
-              <a:t>Your role log, current</a:t>
+              <a:t>Every member’s commits on your group branch</a:t>
             </a:r>
           </a:p>
           <a:p>

--- a/12-group-presentations/slides.pptx
+++ b/12-group-presentations/slides.pptx
@@ -3742,7 +3742,7 @@
             </a:pPr>
             <a:r>
               <a:rPr/>
-              <a:t>Every lab this term ended with three sentences. This is why.</a:t>
+              <a:t>Every practice session this term ended with three sentences. This is why.</a:t>
             </a:r>
           </a:p>
           <a:p>

--- a/12-group-presentations/slides.pptx
+++ b/12-group-presentations/slides.pptx
@@ -923,15 +923,15 @@
         </p:nvSpPr>
         <p:spPr>
           <a:xfrm>
-            <a:off x="722313" y="3305176"/>
-            <a:ext cx="7772400" cy="1021556"/>
+            <a:off x="722313" y="1850000"/>
+            <a:ext cx="7772400" cy="1300000"/>
           </a:xfrm>
         </p:spPr>
         <p:txBody>
           <a:bodyPr anchor="t"/>
           <a:lstStyle>
             <a:lvl1pPr algn="l">
-              <a:defRPr sz="1850" b="1" cap="all"/>
+              <a:defRPr sz="2800" b="1" cap="none"/>
             </a:lvl1pPr>
           </a:lstStyle>
           <a:p>
@@ -954,8 +954,8 @@
         </p:nvSpPr>
         <p:spPr>
           <a:xfrm>
-            <a:off x="722313" y="2180035"/>
-            <a:ext cx="7772400" cy="1125140"/>
+            <a:off x="722313" y="3250000"/>
+            <a:ext cx="7772400" cy="700000"/>
           </a:xfrm>
         </p:spPr>
         <p:txBody>
@@ -3445,8 +3445,8 @@
         </p:nvSpPr>
         <p:spPr>
           <a:xfrm>
-            <a:off x="722313" y="3305176"/>
-            <a:ext cx="7772400" cy="1021556"/>
+            <a:off x="722313" y="1850000"/>
+            <a:ext cx="7772400" cy="1300000"/>
           </a:xfrm>
         </p:spPr>
         <p:txBody>
@@ -3799,8 +3799,8 @@
         </p:nvSpPr>
         <p:spPr>
           <a:xfrm>
-            <a:off x="722313" y="3305176"/>
-            <a:ext cx="7772400" cy="1021556"/>
+            <a:off x="722313" y="1850000"/>
+            <a:ext cx="7772400" cy="1300000"/>
           </a:xfrm>
         </p:spPr>
         <p:txBody>
@@ -4121,8 +4121,8 @@
         </p:nvSpPr>
         <p:spPr>
           <a:xfrm>
-            <a:off x="722313" y="3305176"/>
-            <a:ext cx="7772400" cy="1021556"/>
+            <a:off x="722313" y="1850000"/>
+            <a:ext cx="7772400" cy="1300000"/>
           </a:xfrm>
         </p:spPr>
         <p:txBody>
@@ -4533,8 +4533,8 @@
         </p:nvSpPr>
         <p:spPr>
           <a:xfrm>
-            <a:off x="722313" y="3305176"/>
-            <a:ext cx="7772400" cy="1021556"/>
+            <a:off x="722313" y="1850000"/>
+            <a:ext cx="7772400" cy="1300000"/>
           </a:xfrm>
         </p:spPr>
         <p:txBody>
